--- a/outputs/figures/insar_final_proj/tau_gamma_concept.pptx
+++ b/outputs/figures/insar_final_proj/tau_gamma_concept.pptx
@@ -5,11 +5,13 @@
     <p:sldMasterId id="2147483648" r:id="rId1"/>
   </p:sldMasterIdLst>
   <p:notesMasterIdLst>
-    <p:notesMasterId r:id="rId4"/>
+    <p:notesMasterId r:id="rId6"/>
   </p:notesMasterIdLst>
   <p:sldIdLst>
     <p:sldId id="256" r:id="rId2"/>
     <p:sldId id="257" r:id="rId3"/>
+    <p:sldId id="258" r:id="rId4"/>
+    <p:sldId id="259" r:id="rId5"/>
   </p:sldIdLst>
   <p:sldSz cx="12192000" cy="6858000"/>
   <p:notesSz cx="6858000" cy="9144000"/>
@@ -108,15 +110,144 @@
       </a:defRPr>
     </a:lvl9pPr>
   </p:defaultTextStyle>
+  <p:extLst>
+    <p:ext uri="{EFAFB233-063F-42B5-8137-9DF3F51BA10A}">
+      <p15:sldGuideLst xmlns:p15="http://schemas.microsoft.com/office/powerpoint/2012/main"/>
+    </p:ext>
+  </p:extLst>
 </p:presentation>
 </file>
 
 <file path=ppt/revisionInfo.xml><?xml version="1.0" encoding="utf-8"?>
 <p1510:revInfo xmlns:a="http://schemas.openxmlformats.org/drawingml/2006/main" xmlns:r="http://schemas.openxmlformats.org/officeDocument/2006/relationships" xmlns:p1510="http://schemas.microsoft.com/office/powerpoint/2015/10/main">
   <p1510:revLst>
-    <p1510:client id="{713BD9A5-7308-E243-963C-A50DE6B9F0B6}" v="36" dt="2025-12-10T17:26:27.051"/>
+    <p1510:client id="{713BD9A5-7308-E243-963C-A50DE6B9F0B6}" v="43" dt="2025-12-11T17:47:25.751"/>
   </p1510:revLst>
 </p1510:revInfo>
+</file>
+
+<file path=ppt/changesInfos/changesInfo1.xml><?xml version="1.0" encoding="utf-8"?>
+<pc:chgInfo xmlns:a="http://schemas.openxmlformats.org/drawingml/2006/main" xmlns:r="http://schemas.openxmlformats.org/officeDocument/2006/relationships" xmlns:ac="http://schemas.microsoft.com/office/drawing/2013/main/command" xmlns:pc="http://schemas.microsoft.com/office/powerpoint/2013/main/command">
+  <pc:docChgLst>
+    <pc:chgData name="Julia Lober" userId="ff81a6c5-8a3c-409e-8169-f2bf6af6a88d" providerId="ADAL" clId="{FFB91BD3-6C4B-569F-A3C4-1B2517482AB3}"/>
+    <pc:docChg chg="custSel addSld modSld">
+      <pc:chgData name="Julia Lober" userId="ff81a6c5-8a3c-409e-8169-f2bf6af6a88d" providerId="ADAL" clId="{FFB91BD3-6C4B-569F-A3C4-1B2517482AB3}" dt="2025-12-11T17:48:27.763" v="90" actId="1076"/>
+      <pc:docMkLst>
+        <pc:docMk/>
+      </pc:docMkLst>
+      <pc:sldChg chg="addSp modSp new mod">
+        <pc:chgData name="Julia Lober" userId="ff81a6c5-8a3c-409e-8169-f2bf6af6a88d" providerId="ADAL" clId="{FFB91BD3-6C4B-569F-A3C4-1B2517482AB3}" dt="2025-12-11T17:46:33.497" v="66" actId="1076"/>
+        <pc:sldMkLst>
+          <pc:docMk/>
+          <pc:sldMk cId="295236159" sldId="258"/>
+        </pc:sldMkLst>
+        <pc:spChg chg="add mod">
+          <ac:chgData name="Julia Lober" userId="ff81a6c5-8a3c-409e-8169-f2bf6af6a88d" providerId="ADAL" clId="{FFB91BD3-6C4B-569F-A3C4-1B2517482AB3}" dt="2025-12-11T17:43:37.892" v="4" actId="208"/>
+          <ac:spMkLst>
+            <pc:docMk/>
+            <pc:sldMk cId="295236159" sldId="258"/>
+            <ac:spMk id="4" creationId="{10E12221-C379-16F7-346F-D1A5149C30D8}"/>
+          </ac:spMkLst>
+        </pc:spChg>
+        <pc:spChg chg="add mod">
+          <ac:chgData name="Julia Lober" userId="ff81a6c5-8a3c-409e-8169-f2bf6af6a88d" providerId="ADAL" clId="{FFB91BD3-6C4B-569F-A3C4-1B2517482AB3}" dt="2025-12-11T17:43:43.649" v="6" actId="1076"/>
+          <ac:spMkLst>
+            <pc:docMk/>
+            <pc:sldMk cId="295236159" sldId="258"/>
+            <ac:spMk id="5" creationId="{5CEDF287-D60E-C6B2-7FBA-E4B3CC639D24}"/>
+          </ac:spMkLst>
+        </pc:spChg>
+        <pc:spChg chg="add mod">
+          <ac:chgData name="Julia Lober" userId="ff81a6c5-8a3c-409e-8169-f2bf6af6a88d" providerId="ADAL" clId="{FFB91BD3-6C4B-569F-A3C4-1B2517482AB3}" dt="2025-12-11T17:44:09.647" v="14" actId="2085"/>
+          <ac:spMkLst>
+            <pc:docMk/>
+            <pc:sldMk cId="295236159" sldId="258"/>
+            <ac:spMk id="6" creationId="{5B61D56F-B742-8982-1311-B33E437E033F}"/>
+          </ac:spMkLst>
+        </pc:spChg>
+        <pc:spChg chg="add mod">
+          <ac:chgData name="Julia Lober" userId="ff81a6c5-8a3c-409e-8169-f2bf6af6a88d" providerId="ADAL" clId="{FFB91BD3-6C4B-569F-A3C4-1B2517482AB3}" dt="2025-12-11T17:46:27.207" v="65" actId="1076"/>
+          <ac:spMkLst>
+            <pc:docMk/>
+            <pc:sldMk cId="295236159" sldId="258"/>
+            <ac:spMk id="7" creationId="{330D8CDD-DAC7-8F91-D552-299DBD78CBD8}"/>
+          </ac:spMkLst>
+        </pc:spChg>
+        <pc:spChg chg="add mod">
+          <ac:chgData name="Julia Lober" userId="ff81a6c5-8a3c-409e-8169-f2bf6af6a88d" providerId="ADAL" clId="{FFB91BD3-6C4B-569F-A3C4-1B2517482AB3}" dt="2025-12-11T17:45:07.359" v="30" actId="207"/>
+          <ac:spMkLst>
+            <pc:docMk/>
+            <pc:sldMk cId="295236159" sldId="258"/>
+            <ac:spMk id="8" creationId="{53FAE0BC-5CB7-F786-EE6D-07BB19230322}"/>
+          </ac:spMkLst>
+        </pc:spChg>
+        <pc:spChg chg="add mod">
+          <ac:chgData name="Julia Lober" userId="ff81a6c5-8a3c-409e-8169-f2bf6af6a88d" providerId="ADAL" clId="{FFB91BD3-6C4B-569F-A3C4-1B2517482AB3}" dt="2025-12-11T17:45:43.832" v="56" actId="14100"/>
+          <ac:spMkLst>
+            <pc:docMk/>
+            <pc:sldMk cId="295236159" sldId="258"/>
+            <ac:spMk id="9" creationId="{F1A64EF7-848E-B1B7-C338-97BFB81D3AAB}"/>
+          </ac:spMkLst>
+        </pc:spChg>
+        <pc:spChg chg="add mod">
+          <ac:chgData name="Julia Lober" userId="ff81a6c5-8a3c-409e-8169-f2bf6af6a88d" providerId="ADAL" clId="{FFB91BD3-6C4B-569F-A3C4-1B2517482AB3}" dt="2025-12-11T17:46:33.497" v="66" actId="1076"/>
+          <ac:spMkLst>
+            <pc:docMk/>
+            <pc:sldMk cId="295236159" sldId="258"/>
+            <ac:spMk id="10" creationId="{ADBBF736-9A7C-DB0F-CFD2-DAA22F616F04}"/>
+          </ac:spMkLst>
+        </pc:spChg>
+        <pc:picChg chg="add">
+          <ac:chgData name="Julia Lober" userId="ff81a6c5-8a3c-409e-8169-f2bf6af6a88d" providerId="ADAL" clId="{FFB91BD3-6C4B-569F-A3C4-1B2517482AB3}" dt="2025-12-11T17:42:39.455" v="1"/>
+          <ac:picMkLst>
+            <pc:docMk/>
+            <pc:sldMk cId="295236159" sldId="258"/>
+            <ac:picMk id="1026" creationId="{0FE2241A-9970-A3CE-2AE6-98CAC230653D}"/>
+          </ac:picMkLst>
+        </pc:picChg>
+      </pc:sldChg>
+      <pc:sldChg chg="addSp delSp modSp new mod">
+        <pc:chgData name="Julia Lober" userId="ff81a6c5-8a3c-409e-8169-f2bf6af6a88d" providerId="ADAL" clId="{FFB91BD3-6C4B-569F-A3C4-1B2517482AB3}" dt="2025-12-11T17:48:27.763" v="90" actId="1076"/>
+        <pc:sldMkLst>
+          <pc:docMk/>
+          <pc:sldMk cId="3303330227" sldId="259"/>
+        </pc:sldMkLst>
+        <pc:spChg chg="del">
+          <ac:chgData name="Julia Lober" userId="ff81a6c5-8a3c-409e-8169-f2bf6af6a88d" providerId="ADAL" clId="{FFB91BD3-6C4B-569F-A3C4-1B2517482AB3}" dt="2025-12-11T17:47:00.443" v="69" actId="478"/>
+          <ac:spMkLst>
+            <pc:docMk/>
+            <pc:sldMk cId="3303330227" sldId="259"/>
+            <ac:spMk id="2" creationId="{FD510B8C-CBC0-046D-2294-1BF44D13E333}"/>
+          </ac:spMkLst>
+        </pc:spChg>
+        <pc:spChg chg="del">
+          <ac:chgData name="Julia Lober" userId="ff81a6c5-8a3c-409e-8169-f2bf6af6a88d" providerId="ADAL" clId="{FFB91BD3-6C4B-569F-A3C4-1B2517482AB3}" dt="2025-12-11T17:46:57.729" v="68" actId="931"/>
+          <ac:spMkLst>
+            <pc:docMk/>
+            <pc:sldMk cId="3303330227" sldId="259"/>
+            <ac:spMk id="3" creationId="{4EECD4A8-4254-2560-47B3-5B9E7FCCB29D}"/>
+          </ac:spMkLst>
+        </pc:spChg>
+        <pc:picChg chg="add mod">
+          <ac:chgData name="Julia Lober" userId="ff81a6c5-8a3c-409e-8169-f2bf6af6a88d" providerId="ADAL" clId="{FFB91BD3-6C4B-569F-A3C4-1B2517482AB3}" dt="2025-12-11T17:47:16.032" v="75" actId="1076"/>
+          <ac:picMkLst>
+            <pc:docMk/>
+            <pc:sldMk cId="3303330227" sldId="259"/>
+            <ac:picMk id="5" creationId="{A5308BFE-BC52-2729-B9EC-949ED80CA110}"/>
+          </ac:picMkLst>
+        </pc:picChg>
+        <pc:picChg chg="add mod">
+          <ac:chgData name="Julia Lober" userId="ff81a6c5-8a3c-409e-8169-f2bf6af6a88d" providerId="ADAL" clId="{FFB91BD3-6C4B-569F-A3C4-1B2517482AB3}" dt="2025-12-11T17:48:27.763" v="90" actId="1076"/>
+          <ac:picMkLst>
+            <pc:docMk/>
+            <pc:sldMk cId="3303330227" sldId="259"/>
+            <ac:picMk id="7" creationId="{BD693B91-33B3-5A0F-96D4-767744556976}"/>
+          </ac:picMkLst>
+        </pc:picChg>
+      </pc:sldChg>
+    </pc:docChg>
+  </pc:docChgLst>
+</pc:chgInfo>
 </file>
 
 <file path=ppt/notesMasters/notesMaster1.xml><?xml version="1.0" encoding="utf-8"?>
@@ -201,7 +332,7 @@
           <a:p>
             <a:fld id="{D769EE68-791D-8A4D-A6F4-910844E13EE3}" type="datetimeFigureOut">
               <a:rPr lang="en-US" smtClean="0"/>
-              <a:t>12/9/25</a:t>
+              <a:t>12/11/25</a:t>
             </a:fld>
             <a:endParaRPr lang="en-US"/>
           </a:p>
@@ -699,7 +830,7 @@
           <a:p>
             <a:fld id="{160A7020-6DD7-FC44-8619-9FCEA0CB2A5F}" type="datetimeFigureOut">
               <a:rPr lang="en-US" smtClean="0"/>
-              <a:t>12/9/25</a:t>
+              <a:t>12/11/25</a:t>
             </a:fld>
             <a:endParaRPr lang="en-US"/>
           </a:p>
@@ -897,7 +1028,7 @@
           <a:p>
             <a:fld id="{160A7020-6DD7-FC44-8619-9FCEA0CB2A5F}" type="datetimeFigureOut">
               <a:rPr lang="en-US" smtClean="0"/>
-              <a:t>12/9/25</a:t>
+              <a:t>12/11/25</a:t>
             </a:fld>
             <a:endParaRPr lang="en-US"/>
           </a:p>
@@ -1105,7 +1236,7 @@
           <a:p>
             <a:fld id="{160A7020-6DD7-FC44-8619-9FCEA0CB2A5F}" type="datetimeFigureOut">
               <a:rPr lang="en-US" smtClean="0"/>
-              <a:t>12/9/25</a:t>
+              <a:t>12/11/25</a:t>
             </a:fld>
             <a:endParaRPr lang="en-US"/>
           </a:p>
@@ -1303,7 +1434,7 @@
           <a:p>
             <a:fld id="{160A7020-6DD7-FC44-8619-9FCEA0CB2A5F}" type="datetimeFigureOut">
               <a:rPr lang="en-US" smtClean="0"/>
-              <a:t>12/9/25</a:t>
+              <a:t>12/11/25</a:t>
             </a:fld>
             <a:endParaRPr lang="en-US"/>
           </a:p>
@@ -1578,7 +1709,7 @@
           <a:p>
             <a:fld id="{160A7020-6DD7-FC44-8619-9FCEA0CB2A5F}" type="datetimeFigureOut">
               <a:rPr lang="en-US" smtClean="0"/>
-              <a:t>12/9/25</a:t>
+              <a:t>12/11/25</a:t>
             </a:fld>
             <a:endParaRPr lang="en-US"/>
           </a:p>
@@ -1843,7 +1974,7 @@
           <a:p>
             <a:fld id="{160A7020-6DD7-FC44-8619-9FCEA0CB2A5F}" type="datetimeFigureOut">
               <a:rPr lang="en-US" smtClean="0"/>
-              <a:t>12/9/25</a:t>
+              <a:t>12/11/25</a:t>
             </a:fld>
             <a:endParaRPr lang="en-US"/>
           </a:p>
@@ -2255,7 +2386,7 @@
           <a:p>
             <a:fld id="{160A7020-6DD7-FC44-8619-9FCEA0CB2A5F}" type="datetimeFigureOut">
               <a:rPr lang="en-US" smtClean="0"/>
-              <a:t>12/9/25</a:t>
+              <a:t>12/11/25</a:t>
             </a:fld>
             <a:endParaRPr lang="en-US"/>
           </a:p>
@@ -2396,7 +2527,7 @@
           <a:p>
             <a:fld id="{160A7020-6DD7-FC44-8619-9FCEA0CB2A5F}" type="datetimeFigureOut">
               <a:rPr lang="en-US" smtClean="0"/>
-              <a:t>12/9/25</a:t>
+              <a:t>12/11/25</a:t>
             </a:fld>
             <a:endParaRPr lang="en-US"/>
           </a:p>
@@ -2509,7 +2640,7 @@
           <a:p>
             <a:fld id="{160A7020-6DD7-FC44-8619-9FCEA0CB2A5F}" type="datetimeFigureOut">
               <a:rPr lang="en-US" smtClean="0"/>
-              <a:t>12/9/25</a:t>
+              <a:t>12/11/25</a:t>
             </a:fld>
             <a:endParaRPr lang="en-US"/>
           </a:p>
@@ -2820,7 +2951,7 @@
           <a:p>
             <a:fld id="{160A7020-6DD7-FC44-8619-9FCEA0CB2A5F}" type="datetimeFigureOut">
               <a:rPr lang="en-US" smtClean="0"/>
-              <a:t>12/9/25</a:t>
+              <a:t>12/11/25</a:t>
             </a:fld>
             <a:endParaRPr lang="en-US"/>
           </a:p>
@@ -3108,7 +3239,7 @@
           <a:p>
             <a:fld id="{160A7020-6DD7-FC44-8619-9FCEA0CB2A5F}" type="datetimeFigureOut">
               <a:rPr lang="en-US" smtClean="0"/>
-              <a:t>12/9/25</a:t>
+              <a:t>12/11/25</a:t>
             </a:fld>
             <a:endParaRPr lang="en-US"/>
           </a:p>
@@ -3349,7 +3480,7 @@
           <a:p>
             <a:fld id="{160A7020-6DD7-FC44-8619-9FCEA0CB2A5F}" type="datetimeFigureOut">
               <a:rPr lang="en-US" smtClean="0"/>
-              <a:t>12/9/25</a:t>
+              <a:t>12/11/25</a:t>
             </a:fld>
             <a:endParaRPr lang="en-US"/>
           </a:p>
@@ -17799,8 +17930,8 @@
           </a:fontRef>
         </p:style>
       </p:cxnSp>
-      <mc:AlternateContent xmlns:mc="http://schemas.openxmlformats.org/markup-compatibility/2006">
-        <mc:Choice xmlns:a14="http://schemas.microsoft.com/office/drawing/2010/main" Requires="a14">
+      <mc:AlternateContent xmlns:mc="http://schemas.openxmlformats.org/markup-compatibility/2006" xmlns:a14="http://schemas.microsoft.com/office/drawing/2010/main">
+        <mc:Choice Requires="a14">
           <p:sp>
             <p:nvSpPr>
               <p:cNvPr id="275" name="TextBox 274">
@@ -17829,6 +17960,7 @@
               </a:bodyPr>
               <a:lstStyle/>
               <a:p>
+                <a:pPr/>
                 <a14:m>
                   <m:oMathPara xmlns:m="http://schemas.openxmlformats.org/officeDocument/2006/math">
                     <m:oMathParaPr>
@@ -17874,7 +18006,7 @@
             </p:txBody>
           </p:sp>
         </mc:Choice>
-        <mc:Fallback>
+        <mc:Fallback xmlns="">
           <p:sp>
             <p:nvSpPr>
               <p:cNvPr id="275" name="TextBox 274">
@@ -17919,8 +18051,8 @@
           </p:sp>
         </mc:Fallback>
       </mc:AlternateContent>
-      <mc:AlternateContent xmlns:mc="http://schemas.openxmlformats.org/markup-compatibility/2006">
-        <mc:Choice xmlns:a14="http://schemas.microsoft.com/office/drawing/2010/main" Requires="a14">
+      <mc:AlternateContent xmlns:mc="http://schemas.openxmlformats.org/markup-compatibility/2006" xmlns:a14="http://schemas.microsoft.com/office/drawing/2010/main">
+        <mc:Choice Requires="a14">
           <p:sp>
             <p:nvSpPr>
               <p:cNvPr id="278" name="TextBox 277">
@@ -17949,6 +18081,7 @@
               </a:bodyPr>
               <a:lstStyle/>
               <a:p>
+                <a:pPr/>
                 <a14:m>
                   <m:oMathPara xmlns:m="http://schemas.openxmlformats.org/officeDocument/2006/math">
                     <m:oMathParaPr>
@@ -17970,7 +18103,7 @@
             </p:txBody>
           </p:sp>
         </mc:Choice>
-        <mc:Fallback>
+        <mc:Fallback xmlns="">
           <p:sp>
             <p:nvSpPr>
               <p:cNvPr id="278" name="TextBox 277">
@@ -19247,8 +19380,8 @@
           </p:style>
         </p:cxnSp>
       </p:grpSp>
-      <mc:AlternateContent xmlns:mc="http://schemas.openxmlformats.org/markup-compatibility/2006">
-        <mc:Choice xmlns:a14="http://schemas.microsoft.com/office/drawing/2010/main" Requires="a14">
+      <mc:AlternateContent xmlns:mc="http://schemas.openxmlformats.org/markup-compatibility/2006" xmlns:a14="http://schemas.microsoft.com/office/drawing/2010/main">
+        <mc:Choice Requires="a14">
           <p:sp>
             <p:nvSpPr>
               <p:cNvPr id="281" name="TextBox 280">
@@ -19277,6 +19410,7 @@
               </a:bodyPr>
               <a:lstStyle/>
               <a:p>
+                <a:pPr/>
                 <a14:m>
                   <m:oMathPara xmlns:m="http://schemas.openxmlformats.org/officeDocument/2006/math">
                     <m:oMathParaPr>
@@ -19319,7 +19453,7 @@
             </p:txBody>
           </p:sp>
         </mc:Choice>
-        <mc:Fallback>
+        <mc:Fallback xmlns="">
           <p:sp>
             <p:nvSpPr>
               <p:cNvPr id="281" name="TextBox 280">
@@ -19713,6 +19847,582 @@
     <p:extLst>
       <p:ext uri="{BB962C8B-B14F-4D97-AF65-F5344CB8AC3E}">
         <p14:creationId xmlns:p14="http://schemas.microsoft.com/office/powerpoint/2010/main" val="526022034"/>
+      </p:ext>
+    </p:extLst>
+  </p:cSld>
+  <p:clrMapOvr>
+    <a:masterClrMapping/>
+  </p:clrMapOvr>
+</p:sld>
+</file>
+
+<file path=ppt/slides/slide3.xml><?xml version="1.0" encoding="utf-8"?>
+<p:sld xmlns:a="http://schemas.openxmlformats.org/drawingml/2006/main" xmlns:r="http://schemas.openxmlformats.org/officeDocument/2006/relationships" xmlns:p="http://schemas.openxmlformats.org/presentationml/2006/main">
+  <p:cSld>
+    <p:spTree>
+      <p:nvGrpSpPr>
+        <p:cNvPr id="1" name=""/>
+        <p:cNvGrpSpPr/>
+        <p:nvPr/>
+      </p:nvGrpSpPr>
+      <p:grpSpPr>
+        <a:xfrm>
+          <a:off x="0" y="0"/>
+          <a:ext cx="0" cy="0"/>
+          <a:chOff x="0" y="0"/>
+          <a:chExt cx="0" cy="0"/>
+        </a:xfrm>
+      </p:grpSpPr>
+      <p:sp>
+        <p:nvSpPr>
+          <p:cNvPr id="2" name="Title 1">
+            <a:extLst>
+              <a:ext uri="{FF2B5EF4-FFF2-40B4-BE49-F238E27FC236}">
+                <a16:creationId xmlns:a16="http://schemas.microsoft.com/office/drawing/2014/main" id="{AA3125CA-03B5-3F68-AC58-E5DDB818B439}"/>
+              </a:ext>
+            </a:extLst>
+          </p:cNvPr>
+          <p:cNvSpPr>
+            <a:spLocks noGrp="1"/>
+          </p:cNvSpPr>
+          <p:nvPr>
+            <p:ph type="title"/>
+          </p:nvPr>
+        </p:nvSpPr>
+        <p:spPr/>
+        <p:txBody>
+          <a:bodyPr/>
+          <a:lstStyle/>
+          <a:p>
+            <a:endParaRPr lang="en-US"/>
+          </a:p>
+        </p:txBody>
+      </p:sp>
+      <p:sp>
+        <p:nvSpPr>
+          <p:cNvPr id="3" name="Content Placeholder 2">
+            <a:extLst>
+              <a:ext uri="{FF2B5EF4-FFF2-40B4-BE49-F238E27FC236}">
+                <a16:creationId xmlns:a16="http://schemas.microsoft.com/office/drawing/2014/main" id="{2AA3D1C2-2B72-35D4-9DEF-D778AB4F92C0}"/>
+              </a:ext>
+            </a:extLst>
+          </p:cNvPr>
+          <p:cNvSpPr>
+            <a:spLocks noGrp="1"/>
+          </p:cNvSpPr>
+          <p:nvPr>
+            <p:ph idx="1"/>
+          </p:nvPr>
+        </p:nvSpPr>
+        <p:spPr/>
+        <p:txBody>
+          <a:bodyPr/>
+          <a:lstStyle/>
+          <a:p>
+            <a:endParaRPr lang="en-US" dirty="0"/>
+          </a:p>
+        </p:txBody>
+      </p:sp>
+      <p:pic>
+        <p:nvPicPr>
+          <p:cNvPr id="1026" name="Picture 2" descr="Idaho Region Map Stock Illustrations – 1,602 Idaho Region Map Stock  Illustrations, Vectors &amp; Clipart - Dreamstime">
+            <a:extLst>
+              <a:ext uri="{FF2B5EF4-FFF2-40B4-BE49-F238E27FC236}">
+                <a16:creationId xmlns:a16="http://schemas.microsoft.com/office/drawing/2014/main" id="{0FE2241A-9970-A3CE-2AE6-98CAC230653D}"/>
+              </a:ext>
+            </a:extLst>
+          </p:cNvPr>
+          <p:cNvPicPr>
+            <a:picLocks noChangeAspect="1" noChangeArrowheads="1"/>
+          </p:cNvPicPr>
+          <p:nvPr/>
+        </p:nvPicPr>
+        <p:blipFill>
+          <a:blip r:embed="rId2">
+            <a:extLst>
+              <a:ext uri="{28A0092B-C50C-407E-A947-70E740481C1C}">
+                <a14:useLocalDpi xmlns:a14="http://schemas.microsoft.com/office/drawing/2010/main" val="0"/>
+              </a:ext>
+            </a:extLst>
+          </a:blip>
+          <a:srcRect/>
+          <a:stretch>
+            <a:fillRect/>
+          </a:stretch>
+        </p:blipFill>
+        <p:spPr bwMode="auto">
+          <a:xfrm>
+            <a:off x="3695700" y="0"/>
+            <a:ext cx="4800600" cy="6858000"/>
+          </a:xfrm>
+          <a:prstGeom prst="rect">
+            <a:avLst/>
+          </a:prstGeom>
+          <a:noFill/>
+          <a:extLst>
+            <a:ext uri="{909E8E84-426E-40DD-AFC4-6F175D3DCCD1}">
+              <a14:hiddenFill xmlns:a14="http://schemas.microsoft.com/office/drawing/2010/main">
+                <a:solidFill>
+                  <a:srgbClr val="FFFFFF"/>
+                </a:solidFill>
+              </a14:hiddenFill>
+            </a:ext>
+          </a:extLst>
+        </p:spPr>
+      </p:pic>
+      <p:sp>
+        <p:nvSpPr>
+          <p:cNvPr id="4" name="Rectangle 3">
+            <a:extLst>
+              <a:ext uri="{FF2B5EF4-FFF2-40B4-BE49-F238E27FC236}">
+                <a16:creationId xmlns:a16="http://schemas.microsoft.com/office/drawing/2014/main" id="{10E12221-C379-16F7-346F-D1A5149C30D8}"/>
+              </a:ext>
+            </a:extLst>
+          </p:cNvPr>
+          <p:cNvSpPr/>
+          <p:nvPr/>
+        </p:nvSpPr>
+        <p:spPr>
+          <a:xfrm>
+            <a:off x="6400800" y="365125"/>
+            <a:ext cx="1648918" cy="1733498"/>
+          </a:xfrm>
+          <a:prstGeom prst="rect">
+            <a:avLst/>
+          </a:prstGeom>
+          <a:solidFill>
+            <a:schemeClr val="bg1"/>
+          </a:solidFill>
+          <a:ln>
+            <a:solidFill>
+              <a:schemeClr val="bg1"/>
+            </a:solidFill>
+          </a:ln>
+        </p:spPr>
+        <p:style>
+          <a:lnRef idx="2">
+            <a:schemeClr val="accent1">
+              <a:shade val="15000"/>
+            </a:schemeClr>
+          </a:lnRef>
+          <a:fillRef idx="1">
+            <a:schemeClr val="accent1"/>
+          </a:fillRef>
+          <a:effectRef idx="0">
+            <a:schemeClr val="accent1"/>
+          </a:effectRef>
+          <a:fontRef idx="minor">
+            <a:schemeClr val="lt1"/>
+          </a:fontRef>
+        </p:style>
+        <p:txBody>
+          <a:bodyPr rtlCol="0" anchor="ctr"/>
+          <a:lstStyle/>
+          <a:p>
+            <a:pPr algn="ctr"/>
+            <a:endParaRPr lang="en-US"/>
+          </a:p>
+        </p:txBody>
+      </p:sp>
+      <p:sp>
+        <p:nvSpPr>
+          <p:cNvPr id="5" name="Rectangle 4">
+            <a:extLst>
+              <a:ext uri="{FF2B5EF4-FFF2-40B4-BE49-F238E27FC236}">
+                <a16:creationId xmlns:a16="http://schemas.microsoft.com/office/drawing/2014/main" id="{5CEDF287-D60E-C6B2-7FBA-E4B3CC639D24}"/>
+              </a:ext>
+            </a:extLst>
+          </p:cNvPr>
+          <p:cNvSpPr/>
+          <p:nvPr/>
+        </p:nvSpPr>
+        <p:spPr>
+          <a:xfrm>
+            <a:off x="6400800" y="1996360"/>
+            <a:ext cx="1648918" cy="1733498"/>
+          </a:xfrm>
+          <a:prstGeom prst="rect">
+            <a:avLst/>
+          </a:prstGeom>
+          <a:solidFill>
+            <a:schemeClr val="bg1"/>
+          </a:solidFill>
+          <a:ln>
+            <a:solidFill>
+              <a:schemeClr val="bg1"/>
+            </a:solidFill>
+          </a:ln>
+        </p:spPr>
+        <p:style>
+          <a:lnRef idx="2">
+            <a:schemeClr val="accent1">
+              <a:shade val="15000"/>
+            </a:schemeClr>
+          </a:lnRef>
+          <a:fillRef idx="1">
+            <a:schemeClr val="accent1"/>
+          </a:fillRef>
+          <a:effectRef idx="0">
+            <a:schemeClr val="accent1"/>
+          </a:effectRef>
+          <a:fontRef idx="minor">
+            <a:schemeClr val="lt1"/>
+          </a:fontRef>
+        </p:style>
+        <p:txBody>
+          <a:bodyPr rtlCol="0" anchor="ctr"/>
+          <a:lstStyle/>
+          <a:p>
+            <a:pPr algn="ctr"/>
+            <a:endParaRPr lang="en-US"/>
+          </a:p>
+        </p:txBody>
+      </p:sp>
+      <p:sp>
+        <p:nvSpPr>
+          <p:cNvPr id="6" name="Rectangle 5">
+            <a:extLst>
+              <a:ext uri="{FF2B5EF4-FFF2-40B4-BE49-F238E27FC236}">
+                <a16:creationId xmlns:a16="http://schemas.microsoft.com/office/drawing/2014/main" id="{5B61D56F-B742-8982-1311-B33E437E033F}"/>
+              </a:ext>
+            </a:extLst>
+          </p:cNvPr>
+          <p:cNvSpPr/>
+          <p:nvPr/>
+        </p:nvSpPr>
+        <p:spPr>
+          <a:xfrm rot="20258829">
+            <a:off x="5110619" y="2863109"/>
+            <a:ext cx="780790" cy="1733498"/>
+          </a:xfrm>
+          <a:prstGeom prst="rect">
+            <a:avLst/>
+          </a:prstGeom>
+          <a:solidFill>
+            <a:srgbClr val="A8A8A8"/>
+          </a:solidFill>
+          <a:ln>
+            <a:noFill/>
+          </a:ln>
+        </p:spPr>
+        <p:style>
+          <a:lnRef idx="2">
+            <a:schemeClr val="accent1">
+              <a:shade val="15000"/>
+            </a:schemeClr>
+          </a:lnRef>
+          <a:fillRef idx="1">
+            <a:schemeClr val="accent1"/>
+          </a:fillRef>
+          <a:effectRef idx="0">
+            <a:schemeClr val="accent1"/>
+          </a:effectRef>
+          <a:fontRef idx="minor">
+            <a:schemeClr val="lt1"/>
+          </a:fontRef>
+        </p:style>
+        <p:txBody>
+          <a:bodyPr rtlCol="0" anchor="ctr"/>
+          <a:lstStyle/>
+          <a:p>
+            <a:pPr algn="ctr"/>
+            <a:endParaRPr lang="en-US"/>
+          </a:p>
+        </p:txBody>
+      </p:sp>
+      <p:sp>
+        <p:nvSpPr>
+          <p:cNvPr id="7" name="Rectangle 6">
+            <a:extLst>
+              <a:ext uri="{FF2B5EF4-FFF2-40B4-BE49-F238E27FC236}">
+                <a16:creationId xmlns:a16="http://schemas.microsoft.com/office/drawing/2014/main" id="{330D8CDD-DAC7-8F91-D552-299DBD78CBD8}"/>
+              </a:ext>
+            </a:extLst>
+          </p:cNvPr>
+          <p:cNvSpPr/>
+          <p:nvPr/>
+        </p:nvSpPr>
+        <p:spPr>
+          <a:xfrm>
+            <a:off x="4382210" y="4497780"/>
+            <a:ext cx="2119999" cy="991198"/>
+          </a:xfrm>
+          <a:prstGeom prst="rect">
+            <a:avLst/>
+          </a:prstGeom>
+          <a:solidFill>
+            <a:srgbClr val="A8A8A8"/>
+          </a:solidFill>
+          <a:ln>
+            <a:noFill/>
+          </a:ln>
+        </p:spPr>
+        <p:style>
+          <a:lnRef idx="2">
+            <a:schemeClr val="accent1">
+              <a:shade val="15000"/>
+            </a:schemeClr>
+          </a:lnRef>
+          <a:fillRef idx="1">
+            <a:schemeClr val="accent1"/>
+          </a:fillRef>
+          <a:effectRef idx="0">
+            <a:schemeClr val="accent1"/>
+          </a:effectRef>
+          <a:fontRef idx="minor">
+            <a:schemeClr val="lt1"/>
+          </a:fontRef>
+        </p:style>
+        <p:txBody>
+          <a:bodyPr rtlCol="0" anchor="ctr"/>
+          <a:lstStyle/>
+          <a:p>
+            <a:pPr algn="ctr"/>
+            <a:endParaRPr lang="en-US"/>
+          </a:p>
+        </p:txBody>
+      </p:sp>
+      <p:sp>
+        <p:nvSpPr>
+          <p:cNvPr id="8" name="5-Point Star 7">
+            <a:extLst>
+              <a:ext uri="{FF2B5EF4-FFF2-40B4-BE49-F238E27FC236}">
+                <a16:creationId xmlns:a16="http://schemas.microsoft.com/office/drawing/2014/main" id="{53FAE0BC-5CB7-F786-EE6D-07BB19230322}"/>
+              </a:ext>
+            </a:extLst>
+          </p:cNvPr>
+          <p:cNvSpPr/>
+          <p:nvPr/>
+        </p:nvSpPr>
+        <p:spPr>
+          <a:xfrm>
+            <a:off x="4622430" y="5060515"/>
+            <a:ext cx="300300" cy="263046"/>
+          </a:xfrm>
+          <a:prstGeom prst="star5">
+            <a:avLst/>
+          </a:prstGeom>
+          <a:solidFill>
+            <a:srgbClr val="FFC000"/>
+          </a:solidFill>
+          <a:ln>
+            <a:noFill/>
+          </a:ln>
+        </p:spPr>
+        <p:style>
+          <a:lnRef idx="2">
+            <a:schemeClr val="accent1">
+              <a:shade val="15000"/>
+            </a:schemeClr>
+          </a:lnRef>
+          <a:fillRef idx="1">
+            <a:schemeClr val="accent1"/>
+          </a:fillRef>
+          <a:effectRef idx="0">
+            <a:schemeClr val="accent1"/>
+          </a:effectRef>
+          <a:fontRef idx="minor">
+            <a:schemeClr val="lt1"/>
+          </a:fontRef>
+        </p:style>
+        <p:txBody>
+          <a:bodyPr rtlCol="0" anchor="ctr"/>
+          <a:lstStyle/>
+          <a:p>
+            <a:pPr algn="ctr"/>
+            <a:endParaRPr lang="en-US"/>
+          </a:p>
+        </p:txBody>
+      </p:sp>
+      <p:sp>
+        <p:nvSpPr>
+          <p:cNvPr id="9" name="TextBox 8">
+            <a:extLst>
+              <a:ext uri="{FF2B5EF4-FFF2-40B4-BE49-F238E27FC236}">
+                <a16:creationId xmlns:a16="http://schemas.microsoft.com/office/drawing/2014/main" id="{F1A64EF7-848E-B1B7-C338-97BFB81D3AAB}"/>
+              </a:ext>
+            </a:extLst>
+          </p:cNvPr>
+          <p:cNvSpPr txBox="1"/>
+          <p:nvPr/>
+        </p:nvSpPr>
+        <p:spPr>
+          <a:xfrm>
+            <a:off x="4622430" y="5323561"/>
+            <a:ext cx="1118803" cy="523220"/>
+          </a:xfrm>
+          <a:prstGeom prst="rect">
+            <a:avLst/>
+          </a:prstGeom>
+          <a:noFill/>
+        </p:spPr>
+        <p:txBody>
+          <a:bodyPr wrap="square" rtlCol="0">
+            <a:spAutoFit/>
+          </a:bodyPr>
+          <a:lstStyle/>
+          <a:p>
+            <a:r>
+              <a:rPr lang="en-US" sz="2800" dirty="0">
+                <a:solidFill>
+                  <a:schemeClr val="bg1"/>
+                </a:solidFill>
+              </a:rPr>
+              <a:t>Boise</a:t>
+            </a:r>
+          </a:p>
+        </p:txBody>
+      </p:sp>
+      <p:sp>
+        <p:nvSpPr>
+          <p:cNvPr id="10" name="Rectangle 9">
+            <a:extLst>
+              <a:ext uri="{FF2B5EF4-FFF2-40B4-BE49-F238E27FC236}">
+                <a16:creationId xmlns:a16="http://schemas.microsoft.com/office/drawing/2014/main" id="{ADBBF736-9A7C-DB0F-CFD2-DAA22F616F04}"/>
+              </a:ext>
+            </a:extLst>
+          </p:cNvPr>
+          <p:cNvSpPr/>
+          <p:nvPr/>
+        </p:nvSpPr>
+        <p:spPr>
+          <a:xfrm rot="2873720">
+            <a:off x="5038999" y="4920993"/>
+            <a:ext cx="82222" cy="149004"/>
+          </a:xfrm>
+          <a:prstGeom prst="rect">
+            <a:avLst/>
+          </a:prstGeom>
+          <a:noFill/>
+          <a:ln w="38100">
+            <a:solidFill>
+              <a:srgbClr val="FF0000"/>
+            </a:solidFill>
+          </a:ln>
+        </p:spPr>
+        <p:style>
+          <a:lnRef idx="2">
+            <a:schemeClr val="accent1">
+              <a:shade val="15000"/>
+            </a:schemeClr>
+          </a:lnRef>
+          <a:fillRef idx="1">
+            <a:schemeClr val="accent1"/>
+          </a:fillRef>
+          <a:effectRef idx="0">
+            <a:schemeClr val="accent1"/>
+          </a:effectRef>
+          <a:fontRef idx="minor">
+            <a:schemeClr val="lt1"/>
+          </a:fontRef>
+        </p:style>
+        <p:txBody>
+          <a:bodyPr rtlCol="0" anchor="ctr"/>
+          <a:lstStyle/>
+          <a:p>
+            <a:pPr algn="ctr"/>
+            <a:endParaRPr lang="en-US"/>
+          </a:p>
+        </p:txBody>
+      </p:sp>
+    </p:spTree>
+    <p:extLst>
+      <p:ext uri="{BB962C8B-B14F-4D97-AF65-F5344CB8AC3E}">
+        <p14:creationId xmlns:p14="http://schemas.microsoft.com/office/powerpoint/2010/main" val="295236159"/>
+      </p:ext>
+    </p:extLst>
+  </p:cSld>
+  <p:clrMapOvr>
+    <a:masterClrMapping/>
+  </p:clrMapOvr>
+</p:sld>
+</file>
+
+<file path=ppt/slides/slide4.xml><?xml version="1.0" encoding="utf-8"?>
+<p:sld xmlns:a="http://schemas.openxmlformats.org/drawingml/2006/main" xmlns:r="http://schemas.openxmlformats.org/officeDocument/2006/relationships" xmlns:p="http://schemas.openxmlformats.org/presentationml/2006/main">
+  <p:cSld>
+    <p:spTree>
+      <p:nvGrpSpPr>
+        <p:cNvPr id="1" name=""/>
+        <p:cNvGrpSpPr/>
+        <p:nvPr/>
+      </p:nvGrpSpPr>
+      <p:grpSpPr>
+        <a:xfrm>
+          <a:off x="0" y="0"/>
+          <a:ext cx="0" cy="0"/>
+          <a:chOff x="0" y="0"/>
+          <a:chExt cx="0" cy="0"/>
+        </a:xfrm>
+      </p:grpSpPr>
+      <p:pic>
+        <p:nvPicPr>
+          <p:cNvPr id="5" name="Content Placeholder 4" descr="A map of land with a red rectangle and blue rectangle&#10;&#10;AI-generated content may be incorrect.">
+            <a:extLst>
+              <a:ext uri="{FF2B5EF4-FFF2-40B4-BE49-F238E27FC236}">
+                <a16:creationId xmlns:a16="http://schemas.microsoft.com/office/drawing/2014/main" id="{A5308BFE-BC52-2729-B9EC-949ED80CA110}"/>
+              </a:ext>
+            </a:extLst>
+          </p:cNvPr>
+          <p:cNvPicPr>
+            <a:picLocks noGrp="1" noChangeAspect="1"/>
+          </p:cNvPicPr>
+          <p:nvPr>
+            <p:ph idx="1"/>
+          </p:nvPr>
+        </p:nvPicPr>
+        <p:blipFill>
+          <a:blip r:embed="rId2"/>
+          <a:stretch>
+            <a:fillRect/>
+          </a:stretch>
+        </p:blipFill>
+        <p:spPr>
+          <a:xfrm>
+            <a:off x="1390261" y="0"/>
+            <a:ext cx="9411478" cy="6870381"/>
+          </a:xfrm>
+        </p:spPr>
+      </p:pic>
+      <p:pic>
+        <p:nvPicPr>
+          <p:cNvPr id="7" name="Picture 6" descr="A map of idaho with yellow stars and red squares&#10;&#10;AI-generated content may be incorrect.">
+            <a:extLst>
+              <a:ext uri="{FF2B5EF4-FFF2-40B4-BE49-F238E27FC236}">
+                <a16:creationId xmlns:a16="http://schemas.microsoft.com/office/drawing/2014/main" id="{BD693B91-33B3-5A0F-96D4-767744556976}"/>
+              </a:ext>
+            </a:extLst>
+          </p:cNvPr>
+          <p:cNvPicPr>
+            <a:picLocks noChangeAspect="1"/>
+          </p:cNvPicPr>
+          <p:nvPr/>
+        </p:nvPicPr>
+        <p:blipFill>
+          <a:blip r:embed="rId3"/>
+          <a:stretch>
+            <a:fillRect/>
+          </a:stretch>
+        </p:blipFill>
+        <p:spPr>
+          <a:xfrm>
+            <a:off x="8939783" y="3036030"/>
+            <a:ext cx="1903546" cy="2956393"/>
+          </a:xfrm>
+          <a:prstGeom prst="rect">
+            <a:avLst/>
+          </a:prstGeom>
+          <a:ln w="28575">
+            <a:solidFill>
+              <a:schemeClr val="tx1"/>
+            </a:solidFill>
+          </a:ln>
+        </p:spPr>
+      </p:pic>
+    </p:spTree>
+    <p:extLst>
+      <p:ext uri="{BB962C8B-B14F-4D97-AF65-F5344CB8AC3E}">
+        <p14:creationId xmlns:p14="http://schemas.microsoft.com/office/powerpoint/2010/main" val="3303330227"/>
       </p:ext>
     </p:extLst>
   </p:cSld>
